--- a/AI_for_Operations_Course/Slides/Class_04_Supply_Chain_Optimization.pptx
+++ b/AI_for_Operations_Course/Slides/Class_04_Supply_Chain_Optimization.pptx
@@ -1897,7 +1897,7 @@
                 <a:ea typeface="Calibri" pitchFamily="34" charset="-122"/>
                 <a:cs typeface="Calibri" pitchFamily="34" charset="-120"/>
               </a:rPr>
-              <a:t>Proxiant Academy — www.proxiant.com</a:t>
+              <a:t>Proxiant Academy | proxiant.ai</a:t>
             </a:r>
             <a:endParaRPr lang="en-US" sz="1600" dirty="0"/>
           </a:p>
@@ -1993,6 +1993,10 @@
           </a:solidFill>
           <a:ln/>
         </p:spPr>
+        <p:txBody>
+          <a:bodyPr/>
+          <a:p/>
+        </p:txBody>
       </p:sp>
       <p:sp>
         <p:nvSpPr>
@@ -2363,6 +2367,10 @@
           </a:solidFill>
           <a:ln/>
         </p:spPr>
+        <p:txBody>
+          <a:bodyPr/>
+          <a:p/>
+        </p:txBody>
       </p:sp>
       <p:sp>
         <p:nvSpPr>
@@ -2422,6 +2430,10 @@
           </a:solidFill>
           <a:ln/>
         </p:spPr>
+        <p:txBody>
+          <a:bodyPr/>
+          <a:p/>
+        </p:txBody>
       </p:sp>
       <p:sp>
         <p:nvSpPr>
@@ -2481,6 +2493,10 @@
           </a:solidFill>
           <a:ln/>
         </p:spPr>
+        <p:txBody>
+          <a:bodyPr/>
+          <a:p/>
+        </p:txBody>
       </p:sp>
       <p:sp>
         <p:nvSpPr>
@@ -2540,6 +2556,10 @@
           </a:solidFill>
           <a:ln/>
         </p:spPr>
+        <p:txBody>
+          <a:bodyPr/>
+          <a:p/>
+        </p:txBody>
       </p:sp>
       <p:sp>
         <p:nvSpPr>
@@ -2599,6 +2619,10 @@
           </a:solidFill>
           <a:ln/>
         </p:spPr>
+        <p:txBody>
+          <a:bodyPr/>
+          <a:p/>
+        </p:txBody>
       </p:sp>
       <p:sp>
         <p:nvSpPr>
@@ -2658,6 +2682,10 @@
           </a:solidFill>
           <a:ln/>
         </p:spPr>
+        <p:txBody>
+          <a:bodyPr/>
+          <a:p/>
+        </p:txBody>
       </p:sp>
       <p:sp>
         <p:nvSpPr>
@@ -2717,6 +2745,10 @@
           </a:solidFill>
           <a:ln/>
         </p:spPr>
+        <p:txBody>
+          <a:bodyPr/>
+          <a:p/>
+        </p:txBody>
       </p:sp>
       <p:sp>
         <p:nvSpPr>
@@ -2776,6 +2808,10 @@
           </a:solidFill>
           <a:ln/>
         </p:spPr>
+        <p:txBody>
+          <a:bodyPr/>
+          <a:p/>
+        </p:txBody>
       </p:sp>
       <p:sp>
         <p:nvSpPr>
@@ -2835,6 +2871,10 @@
           </a:solidFill>
           <a:ln/>
         </p:spPr>
+        <p:txBody>
+          <a:bodyPr/>
+          <a:p/>
+        </p:txBody>
       </p:sp>
       <p:sp>
         <p:nvSpPr>
@@ -3238,6 +3278,10 @@
           </a:solidFill>
           <a:ln/>
         </p:spPr>
+        <p:txBody>
+          <a:bodyPr/>
+          <a:p/>
+        </p:txBody>
       </p:sp>
       <p:sp>
         <p:nvSpPr>
@@ -3297,6 +3341,10 @@
           </a:solidFill>
           <a:ln/>
         </p:spPr>
+        <p:txBody>
+          <a:bodyPr/>
+          <a:p/>
+        </p:txBody>
       </p:sp>
       <p:sp>
         <p:nvSpPr>
@@ -3356,6 +3404,10 @@
           </a:solidFill>
           <a:ln/>
         </p:spPr>
+        <p:txBody>
+          <a:bodyPr/>
+          <a:p/>
+        </p:txBody>
       </p:sp>
       <p:sp>
         <p:nvSpPr>
@@ -3415,6 +3467,10 @@
           </a:solidFill>
           <a:ln/>
         </p:spPr>
+        <p:txBody>
+          <a:bodyPr/>
+          <a:p/>
+        </p:txBody>
       </p:sp>
       <p:sp>
         <p:nvSpPr>
@@ -3474,6 +3530,10 @@
           </a:solidFill>
           <a:ln/>
         </p:spPr>
+        <p:txBody>
+          <a:bodyPr/>
+          <a:p/>
+        </p:txBody>
       </p:sp>
       <p:sp>
         <p:nvSpPr>
@@ -3611,6 +3671,10 @@
           </a:solidFill>
           <a:ln/>
         </p:spPr>
+        <p:txBody>
+          <a:bodyPr/>
+          <a:p/>
+        </p:txBody>
       </p:sp>
       <p:sp>
         <p:nvSpPr>
@@ -3748,6 +3812,10 @@
           </a:solidFill>
           <a:ln/>
         </p:spPr>
+        <p:txBody>
+          <a:bodyPr/>
+          <a:p/>
+        </p:txBody>
       </p:sp>
       <p:sp>
         <p:nvSpPr>
@@ -3890,6 +3958,10 @@
             <a:prstDash val="solid"/>
           </a:ln>
         </p:spPr>
+        <p:txBody>
+          <a:bodyPr/>
+          <a:p/>
+        </p:txBody>
       </p:sp>
       <p:sp>
         <p:nvSpPr>
@@ -4098,6 +4170,10 @@
           </a:solidFill>
           <a:ln/>
         </p:spPr>
+        <p:txBody>
+          <a:bodyPr/>
+          <a:p/>
+        </p:txBody>
       </p:sp>
       <p:sp>
         <p:nvSpPr>
@@ -4157,6 +4233,10 @@
           </a:solidFill>
           <a:ln/>
         </p:spPr>
+        <p:txBody>
+          <a:bodyPr/>
+          <a:p/>
+        </p:txBody>
       </p:sp>
       <p:sp>
         <p:nvSpPr>
@@ -4216,6 +4296,10 @@
           </a:solidFill>
           <a:ln/>
         </p:spPr>
+        <p:txBody>
+          <a:bodyPr/>
+          <a:p/>
+        </p:txBody>
       </p:sp>
       <p:sp>
         <p:nvSpPr>
@@ -4275,6 +4359,10 @@
           </a:solidFill>
           <a:ln/>
         </p:spPr>
+        <p:txBody>
+          <a:bodyPr/>
+          <a:p/>
+        </p:txBody>
       </p:sp>
       <p:sp>
         <p:nvSpPr>
@@ -4334,6 +4422,10 @@
           </a:solidFill>
           <a:ln/>
         </p:spPr>
+        <p:txBody>
+          <a:bodyPr/>
+          <a:p/>
+        </p:txBody>
       </p:sp>
       <p:sp>
         <p:nvSpPr>
@@ -4393,6 +4485,10 @@
           </a:solidFill>
           <a:ln/>
         </p:spPr>
+        <p:txBody>
+          <a:bodyPr/>
+          <a:p/>
+        </p:txBody>
       </p:sp>
       <p:sp>
         <p:nvSpPr>
@@ -4569,6 +4665,10 @@
           </a:solidFill>
           <a:ln/>
         </p:spPr>
+        <p:txBody>
+          <a:bodyPr/>
+          <a:p/>
+        </p:txBody>
       </p:sp>
       <p:sp>
         <p:nvSpPr>
@@ -4745,6 +4845,10 @@
           </a:solidFill>
           <a:ln/>
         </p:spPr>
+        <p:txBody>
+          <a:bodyPr/>
+          <a:p/>
+        </p:txBody>
       </p:sp>
       <p:sp>
         <p:nvSpPr>
@@ -4921,6 +5025,10 @@
           </a:solidFill>
           <a:ln/>
         </p:spPr>
+        <p:txBody>
+          <a:bodyPr/>
+          <a:p/>
+        </p:txBody>
       </p:sp>
       <p:sp>
         <p:nvSpPr>
@@ -5097,6 +5205,10 @@
           </a:solidFill>
           <a:ln/>
         </p:spPr>
+        <p:txBody>
+          <a:bodyPr/>
+          <a:p/>
+        </p:txBody>
       </p:sp>
       <p:sp>
         <p:nvSpPr>
@@ -5344,6 +5456,10 @@
           </a:solidFill>
           <a:ln/>
         </p:spPr>
+        <p:txBody>
+          <a:bodyPr/>
+          <a:p/>
+        </p:txBody>
       </p:sp>
       <p:sp>
         <p:nvSpPr>
@@ -5481,6 +5597,10 @@
           </a:solidFill>
           <a:ln/>
         </p:spPr>
+        <p:txBody>
+          <a:bodyPr/>
+          <a:p/>
+        </p:txBody>
       </p:sp>
       <p:sp>
         <p:nvSpPr>
@@ -5579,6 +5699,10 @@
           </a:solidFill>
           <a:ln/>
         </p:spPr>
+        <p:txBody>
+          <a:bodyPr/>
+          <a:p/>
+        </p:txBody>
       </p:sp>
       <p:sp>
         <p:nvSpPr>
@@ -5677,6 +5801,10 @@
           </a:solidFill>
           <a:ln/>
         </p:spPr>
+        <p:txBody>
+          <a:bodyPr/>
+          <a:p/>
+        </p:txBody>
       </p:sp>
       <p:sp>
         <p:nvSpPr>
@@ -5775,6 +5903,10 @@
           </a:solidFill>
           <a:ln/>
         </p:spPr>
+        <p:txBody>
+          <a:bodyPr/>
+          <a:p/>
+        </p:txBody>
       </p:sp>
       <p:sp>
         <p:nvSpPr>
@@ -6078,6 +6210,10 @@
             <a:prstDash val="solid"/>
           </a:ln>
         </p:spPr>
+        <p:txBody>
+          <a:bodyPr/>
+          <a:p/>
+        </p:txBody>
       </p:sp>
       <p:sp>
         <p:nvSpPr>
@@ -6328,6 +6464,10 @@
           </a:solidFill>
           <a:ln/>
         </p:spPr>
+        <p:txBody>
+          <a:bodyPr/>
+          <a:p/>
+        </p:txBody>
       </p:sp>
       <p:sp>
         <p:nvSpPr>
@@ -6546,6 +6686,10 @@
           </a:solidFill>
           <a:ln/>
         </p:spPr>
+        <p:txBody>
+          <a:bodyPr/>
+          <a:p/>
+        </p:txBody>
       </p:sp>
       <p:sp>
         <p:nvSpPr>
@@ -6764,6 +6908,10 @@
           </a:solidFill>
           <a:ln/>
         </p:spPr>
+        <p:txBody>
+          <a:bodyPr/>
+          <a:p/>
+        </p:txBody>
       </p:sp>
       <p:sp>
         <p:nvSpPr>
@@ -6982,6 +7130,10 @@
           </a:solidFill>
           <a:ln/>
         </p:spPr>
+        <p:txBody>
+          <a:bodyPr/>
+          <a:p/>
+        </p:txBody>
       </p:sp>
       <p:sp>
         <p:nvSpPr>
@@ -7112,6 +7264,10 @@
           </a:solidFill>
           <a:ln/>
         </p:spPr>
+        <p:txBody>
+          <a:bodyPr/>
+          <a:p/>
+        </p:txBody>
       </p:sp>
       <p:sp>
         <p:nvSpPr>
@@ -7376,6 +7532,10 @@
             <a:prstDash val="solid"/>
           </a:ln>
         </p:spPr>
+        <p:txBody>
+          <a:bodyPr/>
+          <a:p/>
+        </p:txBody>
       </p:sp>
       <p:sp>
         <p:nvSpPr>
@@ -7591,6 +7751,10 @@
           </a:solidFill>
           <a:ln/>
         </p:spPr>
+        <p:txBody>
+          <a:bodyPr/>
+          <a:p/>
+        </p:txBody>
       </p:sp>
       <p:sp>
         <p:nvSpPr>
@@ -7650,6 +7814,10 @@
           </a:solidFill>
           <a:ln/>
         </p:spPr>
+        <p:txBody>
+          <a:bodyPr/>
+          <a:p/>
+        </p:txBody>
       </p:sp>
       <p:sp>
         <p:nvSpPr>
@@ -7709,6 +7877,10 @@
           </a:solidFill>
           <a:ln/>
         </p:spPr>
+        <p:txBody>
+          <a:bodyPr/>
+          <a:p/>
+        </p:txBody>
       </p:sp>
       <p:sp>
         <p:nvSpPr>
@@ -7768,6 +7940,10 @@
           </a:solidFill>
           <a:ln/>
         </p:spPr>
+        <p:txBody>
+          <a:bodyPr/>
+          <a:p/>
+        </p:txBody>
       </p:sp>
       <p:sp>
         <p:nvSpPr>
@@ -7827,6 +8003,10 @@
           </a:solidFill>
           <a:ln/>
         </p:spPr>
+        <p:txBody>
+          <a:bodyPr/>
+          <a:p/>
+        </p:txBody>
       </p:sp>
       <p:sp>
         <p:nvSpPr>
@@ -7886,6 +8066,10 @@
           </a:solidFill>
           <a:ln/>
         </p:spPr>
+        <p:txBody>
+          <a:bodyPr/>
+          <a:p/>
+        </p:txBody>
       </p:sp>
       <p:sp>
         <p:nvSpPr>
@@ -7945,6 +8129,10 @@
           </a:solidFill>
           <a:ln/>
         </p:spPr>
+        <p:txBody>
+          <a:bodyPr/>
+          <a:p/>
+        </p:txBody>
       </p:sp>
       <p:sp>
         <p:nvSpPr>
